--- a/KBDownloadandInstall/Microsoft Update Catalog 补丁下载工具.pptx
+++ b/KBDownloadandInstall/Microsoft Update Catalog 补丁下载工具.pptx
@@ -15,12 +15,13 @@
     <p:sldId id="265" r:id="rId10"/>
     <p:sldId id="263" r:id="rId11"/>
     <p:sldId id="267" r:id="rId12"/>
-    <p:sldId id="270" r:id="rId13"/>
+    <p:sldId id="271" r:id="rId13"/>
+    <p:sldId id="270" r:id="rId14"/>
   </p:sldIdLst>
   <p:sldSz cx="12192000" cy="6858000"/>
   <p:notesSz cx="6858000" cy="9144000"/>
   <p:custDataLst>
-    <p:tags r:id="rId17"/>
+    <p:tags r:id="rId18"/>
   </p:custDataLst>
   <p:defaultTextStyle>
     <a:defPPr>
@@ -7277,6 +7278,528 @@
       </p:grpSpPr>
       <p:sp>
         <p:nvSpPr>
+          <p:cNvPr id="2" name="标题 1" descr="ba3d2b61-87f0-4fba-908c-f9c567672f24"/>
+          <p:cNvSpPr>
+            <a:spLocks noGrp="1"/>
+          </p:cNvSpPr>
+          <p:nvPr>
+            <p:ph type="title" hasCustomPrompt="1"/>
+          </p:nvPr>
+        </p:nvSpPr>
+        <p:spPr/>
+        <p:txBody>
+          <a:bodyPr/>
+          <a:lstStyle/>
+          <a:p>
+            <a:r>
+              <a:rPr lang="zh-CN" altLang="en-US" dirty="0"/>
+              <a:t>运行批量安装</a:t>
+            </a:r>
+            <a:r>
+              <a:rPr lang="zh-CN" altLang="en-US" dirty="0">
+                <a:sym typeface="+mn-ea"/>
+              </a:rPr>
+              <a:t>补丁</a:t>
+            </a:r>
+            <a:endParaRPr lang="en-US" dirty="0"/>
+          </a:p>
+        </p:txBody>
+      </p:sp>
+      <p:grpSp>
+        <p:nvGrpSpPr>
+          <p:cNvPr id="5" name="29ba56f8-5cb8-44fd-94f9-1e06059cd921.source.2.zh-Hans.pptx" descr="2a1da190-fe48-4de6-8f6e-1233e16dca1b"/>
+          <p:cNvGrpSpPr/>
+          <p:nvPr/>
+        </p:nvGrpSpPr>
+        <p:grpSpPr>
+          <a:xfrm>
+            <a:off x="658813" y="1154430"/>
+            <a:ext cx="9774576" cy="4424989"/>
+            <a:chOff x="658813" y="1154430"/>
+            <a:chExt cx="9774576" cy="4424989"/>
+          </a:xfrm>
+        </p:grpSpPr>
+        <p:sp>
+          <p:nvSpPr>
+            <p:cNvPr id="8" name="椭圆 7" descr="5cf0bade-a7cc-4e16-83be-339a8f30f8a9"/>
+            <p:cNvSpPr/>
+            <p:nvPr/>
+          </p:nvSpPr>
+          <p:spPr>
+            <a:xfrm>
+              <a:off x="6645502" y="1535056"/>
+              <a:ext cx="3787887" cy="3787887"/>
+            </a:xfrm>
+            <a:prstGeom prst="ellipse">
+              <a:avLst/>
+            </a:prstGeom>
+            <a:solidFill>
+              <a:schemeClr val="bg1"/>
+            </a:solidFill>
+            <a:ln>
+              <a:noFill/>
+            </a:ln>
+          </p:spPr>
+          <p:style>
+            <a:lnRef idx="2">
+              <a:schemeClr val="accent1">
+                <a:shade val="50000"/>
+              </a:schemeClr>
+            </a:lnRef>
+            <a:fillRef idx="1">
+              <a:schemeClr val="accent1"/>
+            </a:fillRef>
+            <a:effectRef idx="0">
+              <a:schemeClr val="accent1"/>
+            </a:effectRef>
+            <a:fontRef idx="minor">
+              <a:schemeClr val="lt1"/>
+            </a:fontRef>
+          </p:style>
+          <p:txBody>
+            <a:bodyPr rtlCol="0" anchor="ctr"/>
+            <a:lstStyle/>
+            <a:p>
+              <a:pPr algn="ctr"/>
+              <a:endParaRPr lang="en-GB"/>
+            </a:p>
+          </p:txBody>
+        </p:sp>
+        <p:sp>
+          <p:nvSpPr>
+            <p:cNvPr id="10" name="椭圆 9" descr="242b07d2-1bc3-475d-84ef-13bc8c7bd735"/>
+            <p:cNvSpPr/>
+            <p:nvPr/>
+          </p:nvSpPr>
+          <p:spPr>
+            <a:xfrm>
+              <a:off x="5240705" y="3979019"/>
+              <a:ext cx="1448795" cy="1448795"/>
+            </a:xfrm>
+            <a:prstGeom prst="ellipse">
+              <a:avLst/>
+            </a:prstGeom>
+            <a:ln>
+              <a:noFill/>
+            </a:ln>
+          </p:spPr>
+          <p:style>
+            <a:lnRef idx="2">
+              <a:schemeClr val="accent1">
+                <a:shade val="50000"/>
+              </a:schemeClr>
+            </a:lnRef>
+            <a:fillRef idx="1">
+              <a:schemeClr val="accent1"/>
+            </a:fillRef>
+            <a:effectRef idx="0">
+              <a:schemeClr val="accent1"/>
+            </a:effectRef>
+            <a:fontRef idx="minor">
+              <a:schemeClr val="lt1"/>
+            </a:fontRef>
+          </p:style>
+          <p:txBody>
+            <a:bodyPr rtlCol="0" anchor="ctr"/>
+            <a:lstStyle/>
+            <a:p>
+              <a:pPr algn="ctr"/>
+              <a:endParaRPr lang="en-GB"/>
+            </a:p>
+          </p:txBody>
+        </p:sp>
+        <p:sp>
+          <p:nvSpPr>
+            <p:cNvPr id="11" name="椭圆 10" descr="2aeb7f55-8701-4138-9fe1-479680170393"/>
+            <p:cNvSpPr/>
+            <p:nvPr/>
+          </p:nvSpPr>
+          <p:spPr>
+            <a:xfrm>
+              <a:off x="5764559" y="1791532"/>
+              <a:ext cx="3787887" cy="3787887"/>
+            </a:xfrm>
+            <a:prstGeom prst="ellipse">
+              <a:avLst/>
+            </a:prstGeom>
+            <a:solidFill>
+              <a:schemeClr val="tx2">
+                <a:alpha val="15000"/>
+              </a:schemeClr>
+            </a:solidFill>
+            <a:ln>
+              <a:noFill/>
+            </a:ln>
+          </p:spPr>
+          <p:style>
+            <a:lnRef idx="2">
+              <a:schemeClr val="accent1">
+                <a:shade val="50000"/>
+              </a:schemeClr>
+            </a:lnRef>
+            <a:fillRef idx="1">
+              <a:schemeClr val="accent1"/>
+            </a:fillRef>
+            <a:effectRef idx="0">
+              <a:schemeClr val="accent1"/>
+            </a:effectRef>
+            <a:fontRef idx="minor">
+              <a:schemeClr val="lt1"/>
+            </a:fontRef>
+          </p:style>
+          <p:txBody>
+            <a:bodyPr rtlCol="0" anchor="ctr"/>
+            <a:lstStyle/>
+            <a:p>
+              <a:pPr algn="ctr"/>
+              <a:endParaRPr lang="en-GB"/>
+            </a:p>
+          </p:txBody>
+        </p:sp>
+        <p:sp>
+          <p:nvSpPr>
+            <p:cNvPr id="6" name="矩形: 圆角 5" descr="e4cb98c6-c266-46ca-9a90-a3375c5e1370"/>
+            <p:cNvSpPr/>
+            <p:nvPr/>
+          </p:nvSpPr>
+          <p:spPr>
+            <a:xfrm>
+              <a:off x="658813" y="2238541"/>
+              <a:ext cx="1473455" cy="81533"/>
+            </a:xfrm>
+            <a:prstGeom prst="roundRect">
+              <a:avLst/>
+            </a:prstGeom>
+            <a:ln>
+              <a:noFill/>
+            </a:ln>
+          </p:spPr>
+          <p:style>
+            <a:lnRef idx="2">
+              <a:schemeClr val="accent1">
+                <a:shade val="15000"/>
+              </a:schemeClr>
+            </a:lnRef>
+            <a:fillRef idx="1">
+              <a:schemeClr val="accent1"/>
+            </a:fillRef>
+            <a:effectRef idx="0">
+              <a:schemeClr val="accent1"/>
+            </a:effectRef>
+            <a:fontRef idx="minor">
+              <a:schemeClr val="lt1"/>
+            </a:fontRef>
+          </p:style>
+          <p:txBody>
+            <a:bodyPr rtlCol="0" anchor="ctr"/>
+            <a:lstStyle/>
+            <a:p>
+              <a:pPr algn="ctr"/>
+              <a:endParaRPr lang="zh-CN" altLang="en-US"/>
+            </a:p>
+          </p:txBody>
+        </p:sp>
+        <p:sp>
+          <p:nvSpPr>
+            <p:cNvPr id="13" name="Text1" descr="760aaacc-38b0-414c-87b9-1c5cecab0a76"/>
+            <p:cNvSpPr txBox="1"/>
+            <p:nvPr/>
+          </p:nvSpPr>
+          <p:spPr>
+            <a:xfrm>
+              <a:off x="684213" y="1154430"/>
+              <a:ext cx="7889875" cy="1165860"/>
+            </a:xfrm>
+            <a:prstGeom prst="rect">
+              <a:avLst/>
+            </a:prstGeom>
+            <a:noFill/>
+          </p:spPr>
+          <p:txBody>
+            <a:bodyPr wrap="square" rtlCol="0">
+              <a:normAutofit/>
+            </a:bodyPr>
+            <a:lstStyle>
+              <a:defPPr>
+                <a:defRPr lang="zh-CN"/>
+              </a:defPPr>
+              <a:lvl1pPr algn="ctr">
+                <a:lnSpc>
+                  <a:spcPct val="150000"/>
+                </a:lnSpc>
+                <a:defRPr sz="1000"/>
+              </a:lvl1pPr>
+            </a:lstStyle>
+            <a:p>
+              <a:pPr algn="l">
+                <a:lnSpc>
+                  <a:spcPct val="120000"/>
+                </a:lnSpc>
+                <a:buClrTx/>
+                <a:buSzTx/>
+                <a:buFontTx/>
+              </a:pPr>
+              <a:endParaRPr lang="zh-CN" altLang="en-US" sz="1800"/>
+            </a:p>
+          </p:txBody>
+        </p:sp>
+        <p:sp>
+          <p:nvSpPr>
+            <p:cNvPr id="9" name="Text2" descr="ccd6ec8c-74de-49d0-b36d-1298e39541b7"/>
+            <p:cNvSpPr txBox="1"/>
+            <p:nvPr/>
+          </p:nvSpPr>
+          <p:spPr>
+            <a:xfrm>
+              <a:off x="6490047" y="2961077"/>
+              <a:ext cx="2948668" cy="1448794"/>
+            </a:xfrm>
+            <a:prstGeom prst="rect">
+              <a:avLst/>
+            </a:prstGeom>
+            <a:noFill/>
+          </p:spPr>
+          <p:txBody>
+            <a:bodyPr wrap="square" rtlCol="0">
+              <a:normAutofit/>
+            </a:bodyPr>
+            <a:lstStyle>
+              <a:defPPr>
+                <a:defRPr lang="zh-CN"/>
+              </a:defPPr>
+              <a:lvl1pPr algn="ctr">
+                <a:lnSpc>
+                  <a:spcPct val="150000"/>
+                </a:lnSpc>
+                <a:defRPr sz="1000"/>
+              </a:lvl1pPr>
+            </a:lstStyle>
+            <a:p>
+              <a:pPr algn="l">
+                <a:lnSpc>
+                  <a:spcPct val="120000"/>
+                </a:lnSpc>
+              </a:pPr>
+              <a:endParaRPr lang="en-US" dirty="0"/>
+            </a:p>
+          </p:txBody>
+        </p:sp>
+      </p:grpSp>
+      <p:sp>
+        <p:nvSpPr>
+          <p:cNvPr id="7" name="文本框 6"/>
+          <p:cNvSpPr txBox="1"/>
+          <p:nvPr/>
+        </p:nvSpPr>
+        <p:spPr>
+          <a:xfrm>
+            <a:off x="751205" y="1395730"/>
+            <a:ext cx="9027160" cy="4246245"/>
+          </a:xfrm>
+          <a:prstGeom prst="rect">
+            <a:avLst/>
+          </a:prstGeom>
+          <a:noFill/>
+        </p:spPr>
+        <p:txBody>
+          <a:bodyPr wrap="square" rtlCol="0">
+            <a:spAutoFit/>
+          </a:bodyPr>
+          <a:p>
+            <a:r>
+              <a:rPr lang="zh-CN" altLang="en-US"/>
+              <a:t>右键管理员身份运行</a:t>
+            </a:r>
+            <a:r>
+              <a:rPr lang="en-US" altLang="zh-CN"/>
+              <a:t>installer.exe</a:t>
+            </a:r>
+            <a:endParaRPr lang="en-US" altLang="zh-CN"/>
+          </a:p>
+          <a:p>
+            <a:endParaRPr lang="en-US" altLang="zh-CN"/>
+          </a:p>
+          <a:p>
+            <a:r>
+              <a:rPr lang="zh-CN" altLang="en-US"/>
+              <a:t>程序将自动执行：</a:t>
+            </a:r>
+            <a:endParaRPr lang="zh-CN" altLang="en-US"/>
+          </a:p>
+          <a:p>
+            <a:r>
+              <a:rPr lang="en-US" altLang="en-US"/>
+              <a:t>✅</a:t>
+            </a:r>
+            <a:r>
+              <a:rPr lang="en-US" altLang="zh-CN"/>
+              <a:t> </a:t>
+            </a:r>
+            <a:r>
+              <a:rPr lang="zh-CN" altLang="en-US"/>
+              <a:t>扫描所有</a:t>
+            </a:r>
+            <a:r>
+              <a:rPr lang="en-US" altLang="zh-CN"/>
+              <a:t> KB </a:t>
+            </a:r>
+            <a:r>
+              <a:rPr lang="zh-CN" altLang="en-US"/>
+              <a:t>子文件夹</a:t>
+            </a:r>
+            <a:endParaRPr lang="zh-CN" altLang="en-US"/>
+          </a:p>
+          <a:p>
+            <a:r>
+              <a:rPr lang="en-US" altLang="en-US"/>
+              <a:t>✅</a:t>
+            </a:r>
+            <a:r>
+              <a:rPr lang="en-US" altLang="zh-CN"/>
+              <a:t> </a:t>
+            </a:r>
+            <a:r>
+              <a:rPr lang="zh-CN" altLang="en-US"/>
+              <a:t>匹配当前系统版本（基于文件名识别）</a:t>
+            </a:r>
+            <a:endParaRPr lang="zh-CN" altLang="en-US"/>
+          </a:p>
+          <a:p>
+            <a:r>
+              <a:rPr lang="en-US" altLang="en-US"/>
+              <a:t>✅</a:t>
+            </a:r>
+            <a:r>
+              <a:rPr lang="en-US" altLang="zh-CN"/>
+              <a:t> </a:t>
+            </a:r>
+            <a:r>
+              <a:rPr lang="zh-CN" altLang="en-US"/>
+              <a:t>按顺序静默安装适用补丁</a:t>
+            </a:r>
+            <a:endParaRPr lang="zh-CN" altLang="en-US"/>
+          </a:p>
+          <a:p>
+            <a:endParaRPr lang="zh-CN" altLang="en-US"/>
+          </a:p>
+          <a:p>
+            <a:r>
+              <a:rPr lang="zh-CN" altLang="en-US"/>
+              <a:t>实时输出示例</a:t>
+            </a:r>
+            <a:endParaRPr lang="zh-CN" altLang="en-US"/>
+          </a:p>
+          <a:p>
+            <a:r>
+              <a:rPr lang="zh-CN" altLang="en-US"/>
+              <a:t>正在检查</a:t>
+            </a:r>
+            <a:r>
+              <a:rPr lang="en-US" altLang="zh-CN"/>
+              <a:t> KB5017858 </a:t>
+            </a:r>
+            <a:r>
+              <a:rPr lang="zh-CN" altLang="en-US"/>
+              <a:t>补丁</a:t>
+            </a:r>
+            <a:r>
+              <a:rPr lang="en-US" altLang="zh-CN"/>
+              <a:t>...</a:t>
+            </a:r>
+            <a:endParaRPr lang="en-US" altLang="zh-CN"/>
+          </a:p>
+          <a:p>
+            <a:r>
+              <a:rPr lang="zh-CN" altLang="en-US"/>
+              <a:t>找到匹配补丁：</a:t>
+            </a:r>
+            <a:r>
+              <a:rPr lang="en-US" altLang="zh-CN"/>
+              <a:t>Windows10-x64.msu</a:t>
+            </a:r>
+            <a:endParaRPr lang="en-US" altLang="zh-CN"/>
+          </a:p>
+          <a:p>
+            <a:r>
+              <a:rPr lang="zh-CN" altLang="en-US"/>
+              <a:t>正在安装：</a:t>
+            </a:r>
+            <a:r>
+              <a:rPr lang="en-US" altLang="zh-CN"/>
+              <a:t>patches\KB5017858\Windows10-x64.msu ...</a:t>
+            </a:r>
+            <a:endParaRPr lang="en-US" altLang="zh-CN"/>
+          </a:p>
+          <a:p>
+            <a:r>
+              <a:rPr lang="zh-CN" altLang="en-US"/>
+              <a:t>安装成功：</a:t>
+            </a:r>
+            <a:r>
+              <a:rPr lang="en-US" altLang="zh-CN"/>
+              <a:t>patches\KB5017858\Windows10-x64.msu</a:t>
+            </a:r>
+            <a:endParaRPr lang="en-US" altLang="zh-CN"/>
+          </a:p>
+          <a:p>
+            <a:endParaRPr lang="en-US" altLang="zh-CN"/>
+          </a:p>
+          <a:p>
+            <a:r>
+              <a:rPr lang="zh-CN" altLang="en-US"/>
+              <a:t>正在检查</a:t>
+            </a:r>
+            <a:r>
+              <a:rPr lang="en-US" altLang="zh-CN"/>
+              <a:t> KB5034765 </a:t>
+            </a:r>
+            <a:r>
+              <a:rPr lang="zh-CN" altLang="en-US"/>
+              <a:t>补丁</a:t>
+            </a:r>
+            <a:r>
+              <a:rPr lang="en-US" altLang="zh-CN"/>
+              <a:t>...</a:t>
+            </a:r>
+            <a:endParaRPr lang="en-US" altLang="zh-CN"/>
+          </a:p>
+          <a:p>
+            <a:r>
+              <a:rPr lang="zh-CN" altLang="en-US"/>
+              <a:t>未找到适用于当前系统的补丁，跳过。</a:t>
+            </a:r>
+            <a:endParaRPr lang="zh-CN" altLang="en-US"/>
+          </a:p>
+        </p:txBody>
+      </p:sp>
+    </p:spTree>
+  </p:cSld>
+  <p:clrMapOvr>
+    <a:masterClrMapping/>
+  </p:clrMapOvr>
+  <p:transition/>
+</p:sld>
+</file>
+
+<file path=ppt/slides/slide12.xml><?xml version="1.0" encoding="utf-8"?>
+<p:sld xmlns:a="http://schemas.openxmlformats.org/drawingml/2006/main" xmlns:r="http://schemas.openxmlformats.org/officeDocument/2006/relationships" xmlns:p="http://schemas.openxmlformats.org/presentationml/2006/main">
+  <p:cSld>
+    <p:spTree>
+      <p:nvGrpSpPr>
+        <p:cNvPr id="1" name=""/>
+        <p:cNvGrpSpPr/>
+        <p:nvPr/>
+      </p:nvGrpSpPr>
+      <p:grpSpPr>
+        <a:xfrm>
+          <a:off x="0" y="0"/>
+          <a:ext cx="0" cy="0"/>
+          <a:chOff x="0" y="0"/>
+          <a:chExt cx="0" cy="0"/>
+        </a:xfrm>
+      </p:grpSpPr>
+      <p:sp>
+        <p:nvSpPr>
           <p:cNvPr id="5" name="标题 4" descr="3cc2a8aa-bc53-48a2-8e32-b01f00ec972d"/>
           <p:cNvSpPr>
             <a:spLocks noGrp="1"/>
